--- a/public/fun/pack/pptx/wedding/결혼식_33_식순중심_완행열차.pptx
+++ b/public/fun/pack/pptx/wedding/결혼식_33_식순중심_완행열차.pptx
@@ -3286,6 +3286,14 @@
 <file path=ppt/slides/slide1.xml><?xml version="1.0" encoding="utf-8"?>
 <p:sld xmlns:a="http://schemas.openxmlformats.org/drawingml/2006/main" xmlns:p="http://schemas.openxmlformats.org/presentationml/2006/main" xmlns:r="http://schemas.openxmlformats.org/officeDocument/2006/relationships">
   <p:cSld>
+    <p:bg>
+      <p:bgPr>
+        <a:solidFill>
+          <a:srgbClr val="FBF1EC"/>
+        </a:solidFill>
+        <a:effectLst/>
+      </p:bgPr>
+    </p:bg>
     <p:spTree>
       <p:nvGrpSpPr>
         <p:cNvPr id="1" name=""/>
@@ -3293,30 +3301,116 @@
         <p:nvPr/>
       </p:nvGrpSpPr>
       <p:grpSpPr/>
-      <p:pic>
-        <p:nvPicPr>
-          <p:cNvPr id="3" name="표지 그림" descr="wedding-33.jpg"/>
-          <p:cNvPicPr>
-            <a:picLocks noChangeAspect="1"/>
-          </p:cNvPicPr>
+      <p:sp>
+        <p:nvSpPr>
+          <p:cNvPr id="3" name="사진 자리"/>
+          <p:cNvSpPr/>
           <p:nvPr/>
-        </p:nvPicPr>
-        <p:blipFill>
-          <a:blip r:embed="rId2"/>
-          <a:stretch>
-            <a:fillRect/>
-          </a:stretch>
-        </p:blipFill>
+        </p:nvSpPr>
         <p:spPr>
           <a:xfrm>
             <a:off x="0" y="0"/>
-            <a:ext cx="12191695" cy="6858000"/>
+            <a:ext cx="4389010" cy="6858000"/>
           </a:xfrm>
           <a:prstGeom prst="rect">
             <a:avLst/>
           </a:prstGeom>
-        </p:spPr>
-      </p:pic>
+          <a:solidFill>
+            <a:srgbClr val="EBC0AD"/>
+          </a:solidFill>
+          <a:ln>
+            <a:noFill/>
+          </a:ln>
+        </p:spPr>
+        <p:txBody>
+          <a:bodyPr rtlCol="0" anchor="ctr" wrap="square" lIns="54864" rIns="54864" tIns="27432" bIns="27432">
+            <a:noAutofit/>
+          </a:bodyPr>
+          <a:lstStyle/>
+          <a:p>
+            <a:pPr algn="ctr">
+              <a:lnSpc>
+                <a:spcPct val="100000"/>
+              </a:lnSpc>
+            </a:pPr>
+            <a:r>
+              <a:rPr sz="1400" b="0" i="0">
+                <a:solidFill>
+                  <a:srgbClr val="493127"/>
+                </a:solidFill>
+              </a:rPr>
+              <a:t>사진을 넣어 주세요</a:t>
+            </a:r>
+          </a:p>
+        </p:txBody>
+      </p:sp>
+      <p:sp>
+        <p:nvSpPr>
+          <p:cNvPr id="4" name="장식"/>
+          <p:cNvSpPr/>
+          <p:nvPr/>
+        </p:nvSpPr>
+        <p:spPr>
+          <a:xfrm>
+            <a:off x="365750" y="365760"/>
+            <a:ext cx="3657508" cy="6126480"/>
+          </a:xfrm>
+          <a:prstGeom prst="rect">
+            <a:avLst/>
+          </a:prstGeom>
+          <a:noFill/>
+          <a:ln w="9525">
+            <a:solidFill>
+              <a:srgbClr val="26231F"/>
+            </a:solidFill>
+          </a:ln>
+        </p:spPr>
+        <p:txBody>
+          <a:bodyPr rtlCol="0" anchor="ctr"/>
+          <a:lstStyle/>
+          <a:p>
+            <a:pPr algn="ctr"/>
+          </a:p>
+        </p:txBody>
+      </p:sp>
+      <p:sp>
+        <p:nvSpPr>
+          <p:cNvPr id="5" name="라벨"/>
+          <p:cNvSpPr txBox="1"/>
+          <p:nvPr/>
+        </p:nvSpPr>
+        <p:spPr>
+          <a:xfrm>
+            <a:off x="6827349" y="2148840"/>
+            <a:ext cx="4632844" cy="274320"/>
+          </a:xfrm>
+          <a:prstGeom prst="rect">
+            <a:avLst/>
+          </a:prstGeom>
+          <a:noFill/>
+        </p:spPr>
+        <p:txBody>
+          <a:bodyPr wrap="square" lIns="54864" rIns="54864" tIns="27432" bIns="27432" anchor="t">
+            <a:noAutofit/>
+          </a:bodyPr>
+          <a:lstStyle/>
+          <a:p>
+            <a:pPr algn="l">
+              <a:lnSpc>
+                <a:spcPct val="115000"/>
+              </a:lnSpc>
+            </a:pPr>
+            <a:r>
+              <a:rPr sz="1000" b="1" i="0" spc="250">
+                <a:solidFill>
+                  <a:srgbClr val="26231F"/>
+                </a:solidFill>
+              </a:rPr>
+              <a:t>WEDDING</a:t>
+            </a:r>
+          </a:p>
+        </p:txBody>
+      </p:sp>
       <p:sp>
         <p:nvSpPr>
           <p:cNvPr id="2" name="Title 1"/>
@@ -3329,8 +3423,8 @@
         </p:nvSpPr>
         <p:spPr>
           <a:xfrm>
-            <a:off x="853418" y="2057400"/>
-            <a:ext cx="6095847" cy="1554480"/>
+            <a:off x="6827349" y="2606040"/>
+            <a:ext cx="4632844" cy="1188720"/>
           </a:xfrm>
         </p:spPr>
         <p:txBody>
@@ -3347,7 +3441,7 @@
             <a:r>
               <a:rPr sz="3600" b="1" i="0">
                 <a:solidFill>
-                  <a:srgbClr val="422D24"/>
+                  <a:srgbClr val="26231F"/>
                 </a:solidFill>
               </a:rPr>
               <a:t>저희 결혼합니다</a:t>
@@ -3357,14 +3451,14 @@
       </p:sp>
       <p:sp>
         <p:nvSpPr>
-          <p:cNvPr id="4" name="한 줄 문구"/>
+          <p:cNvPr id="6" name="한 줄 문구"/>
           <p:cNvSpPr txBox="1"/>
           <p:nvPr/>
         </p:nvSpPr>
         <p:spPr>
           <a:xfrm>
-            <a:off x="853418" y="3749039"/>
-            <a:ext cx="6095847" cy="822960"/>
+            <a:off x="6827349" y="3886200"/>
+            <a:ext cx="4632844" cy="822960"/>
           </a:xfrm>
           <a:prstGeom prst="rect">
             <a:avLst/>
@@ -3383,9 +3477,9 @@
               </a:lnSpc>
             </a:pPr>
             <a:r>
-              <a:rPr sz="1700" b="0" i="1">
+              <a:rPr sz="1700" b="0" i="0">
                 <a:solidFill>
-                  <a:srgbClr val="422D24"/>
+                  <a:srgbClr val="26231F"/>
                 </a:solidFill>
               </a:rPr>
               <a:t>식 끝나고 바로 식사하시면 됩니다</a:t>
@@ -3395,14 +3489,14 @@
       </p:sp>
       <p:sp>
         <p:nvSpPr>
-          <p:cNvPr id="5" name="안내 문구"/>
+          <p:cNvPr id="7" name="안내 문구"/>
           <p:cNvSpPr txBox="1"/>
           <p:nvPr/>
         </p:nvSpPr>
         <p:spPr>
           <a:xfrm>
-            <a:off x="853418" y="4617720"/>
-            <a:ext cx="6095847" cy="914400"/>
+            <a:off x="6827349" y="4754880"/>
+            <a:ext cx="4632844" cy="914400"/>
           </a:xfrm>
           <a:prstGeom prst="rect">
             <a:avLst/>
@@ -3423,7 +3517,7 @@
             <a:r>
               <a:rPr sz="1400" b="0" i="0">
                 <a:solidFill>
-                  <a:srgbClr val="666666"/>
+                  <a:srgbClr val="26231F"/>
                 </a:solidFill>
               </a:rPr>
               <a:t>신랑 이름 ♥ 신부 이름</a:t>
@@ -3438,10 +3532,10 @@
             <a:r>
               <a:rPr sz="1400" b="0" i="0">
                 <a:solidFill>
-                  <a:srgbClr val="666666"/>
+                  <a:srgbClr val="26231F"/>
                 </a:solidFill>
               </a:rPr>
-              <a:t>2027. 00. 00 · 예식장 이름</a:t>
+              <a:t>날짜 입력 · 예식장 이름</a:t>
             </a:r>
           </a:p>
         </p:txBody>
@@ -3460,7 +3554,7 @@
     <p:bg>
       <p:bgPr>
         <a:solidFill>
-          <a:srgbClr val="FFFFFF"/>
+          <a:srgbClr val="F6DFD5"/>
         </a:solidFill>
         <a:effectLst/>
       </p:bgPr>
@@ -3480,14 +3574,16 @@
         </p:nvSpPr>
         <p:spPr>
           <a:xfrm>
-            <a:off x="9905695" y="-1463040"/>
-            <a:ext cx="3840480" cy="3840480"/>
-          </a:xfrm>
-          <a:prstGeom prst="ellipse">
-            <a:avLst/>
+            <a:off x="640080" y="566928"/>
+            <a:ext cx="64008" cy="868680"/>
+          </a:xfrm>
+          <a:prstGeom prst="roundRect">
+            <a:avLst>
+              <a:gd name="adj" fmla="val 50000"/>
+            </a:avLst>
           </a:prstGeom>
           <a:solidFill>
-            <a:srgbClr val="EBDCD6"/>
+            <a:srgbClr val="D89579"/>
           </a:solidFill>
           <a:ln>
             <a:noFill/>
@@ -3503,20 +3599,58 @@
       </p:sp>
       <p:sp>
         <p:nvSpPr>
-          <p:cNvPr id="4" name="장식"/>
+          <p:cNvPr id="4" name="상단 라벨"/>
+          <p:cNvSpPr txBox="1"/>
+          <p:nvPr/>
+        </p:nvSpPr>
+        <p:spPr>
+          <a:xfrm>
+            <a:off x="868680" y="274320"/>
+            <a:ext cx="5486400" cy="274320"/>
+          </a:xfrm>
+          <a:prstGeom prst="rect">
+            <a:avLst/>
+          </a:prstGeom>
+          <a:noFill/>
+        </p:spPr>
+        <p:txBody>
+          <a:bodyPr wrap="square" lIns="54864" rIns="54864" tIns="27432" bIns="27432" anchor="ctr">
+            <a:noAutofit/>
+          </a:bodyPr>
+          <a:lstStyle/>
+          <a:p>
+            <a:pPr algn="l">
+              <a:lnSpc>
+                <a:spcPct val="115000"/>
+              </a:lnSpc>
+            </a:pPr>
+            <a:r>
+              <a:rPr sz="900" b="1" i="0" spc="250">
+                <a:solidFill>
+                  <a:srgbClr val="8E8780"/>
+                </a:solidFill>
+              </a:rPr>
+              <a:t>WEDDING</a:t>
+            </a:r>
+          </a:p>
+        </p:txBody>
+      </p:sp>
+      <p:sp>
+        <p:nvSpPr>
+          <p:cNvPr id="5" name="포인트"/>
           <p:cNvSpPr/>
           <p:nvPr/>
         </p:nvSpPr>
         <p:spPr>
           <a:xfrm>
-            <a:off x="11094415" y="274320"/>
-            <a:ext cx="411480" cy="411480"/>
-          </a:xfrm>
-          <a:prstGeom prst="ellipse">
+            <a:off x="11167567" y="667512"/>
+            <a:ext cx="310896" cy="310896"/>
+          </a:xfrm>
+          <a:prstGeom prst="donut">
             <a:avLst/>
           </a:prstGeom>
           <a:solidFill>
-            <a:srgbClr val="855A47"/>
+            <a:srgbClr val="EBC0AD"/>
           </a:solidFill>
           <a:ln>
             <a:noFill/>
@@ -3542,8 +3676,8 @@
         </p:nvSpPr>
         <p:spPr>
           <a:xfrm>
-            <a:off x="640080" y="457200"/>
-            <a:ext cx="9722815" cy="868680"/>
+            <a:off x="868680" y="566928"/>
+            <a:ext cx="9448495" cy="868680"/>
           </a:xfrm>
         </p:spPr>
         <p:txBody>
@@ -3560,7 +3694,7 @@
             <a:r>
               <a:rPr sz="3000" b="1" i="0">
                 <a:solidFill>
-                  <a:srgbClr val="422D24"/>
+                  <a:srgbClr val="26231F"/>
                 </a:solidFill>
               </a:rPr>
               <a:t>신랑 · 신부 소개</a:t>
@@ -3570,25 +3704,23 @@
       </p:sp>
       <p:sp>
         <p:nvSpPr>
-          <p:cNvPr id="5" name="사진 자리"/>
+          <p:cNvPr id="6" name="사진 자리"/>
           <p:cNvSpPr/>
           <p:nvPr/>
         </p:nvSpPr>
         <p:spPr>
           <a:xfrm>
-            <a:off x="1939213" y="1600200"/>
-            <a:ext cx="2400300" cy="2400300"/>
+            <a:off x="1996363" y="1783080"/>
+            <a:ext cx="2286000" cy="2286000"/>
           </a:xfrm>
           <a:prstGeom prst="ellipse">
             <a:avLst/>
           </a:prstGeom>
           <a:solidFill>
-            <a:srgbClr val="EBDCD6"/>
+            <a:srgbClr val="F6DFD5"/>
           </a:solidFill>
           <a:ln w="19050">
-            <a:solidFill>
-              <a:srgbClr val="855A47"/>
-            </a:solidFill>
+            <a:noFill/>
             <a:prstDash val="dash"/>
           </a:ln>
         </p:spPr>
@@ -3606,7 +3738,7 @@
             <a:r>
               <a:rPr sz="1200" b="0" i="0">
                 <a:solidFill>
-                  <a:srgbClr val="422D24"/>
+                  <a:srgbClr val="8E8780"/>
                 </a:solidFill>
               </a:rPr>
               <a:t>사진</a:t>
@@ -3616,13 +3748,13 @@
       </p:sp>
       <p:sp>
         <p:nvSpPr>
-          <p:cNvPr id="6" name="TextBox 5"/>
+          <p:cNvPr id="7" name="TextBox 6"/>
           <p:cNvSpPr txBox="1"/>
           <p:nvPr/>
         </p:nvSpPr>
         <p:spPr>
           <a:xfrm>
-            <a:off x="640080" y="4091939"/>
+            <a:off x="640080" y="4160520"/>
             <a:ext cx="4998567" cy="411480"/>
           </a:xfrm>
           <a:prstGeom prst="rect">
@@ -3644,7 +3776,7 @@
             <a:r>
               <a:rPr sz="1600" b="1" i="0">
                 <a:solidFill>
-                  <a:srgbClr val="422D24"/>
+                  <a:srgbClr val="493127"/>
                 </a:solidFill>
               </a:rPr>
               <a:t>신랑</a:t>
@@ -3654,14 +3786,14 @@
       </p:sp>
       <p:sp>
         <p:nvSpPr>
-          <p:cNvPr id="7" name="TextBox 6"/>
+          <p:cNvPr id="8" name="TextBox 7"/>
           <p:cNvSpPr txBox="1"/>
           <p:nvPr/>
         </p:nvSpPr>
         <p:spPr>
           <a:xfrm>
-            <a:off x="731519" y="4549140"/>
-            <a:ext cx="4815687" cy="1851660"/>
+            <a:off x="731519" y="4617720"/>
+            <a:ext cx="4815687" cy="1737360"/>
           </a:xfrm>
           <a:prstGeom prst="rect">
             <a:avLst/>
@@ -3722,25 +3854,23 @@
       </p:sp>
       <p:sp>
         <p:nvSpPr>
-          <p:cNvPr id="8" name="사진 자리"/>
+          <p:cNvPr id="9" name="사진 자리"/>
           <p:cNvSpPr/>
           <p:nvPr/>
         </p:nvSpPr>
         <p:spPr>
           <a:xfrm>
-            <a:off x="7852181" y="1600200"/>
-            <a:ext cx="2400300" cy="2400300"/>
+            <a:off x="7909331" y="1783080"/>
+            <a:ext cx="2286000" cy="2286000"/>
           </a:xfrm>
           <a:prstGeom prst="ellipse">
             <a:avLst/>
           </a:prstGeom>
           <a:solidFill>
-            <a:srgbClr val="EBDCD6"/>
+            <a:srgbClr val="F6DFD5"/>
           </a:solidFill>
           <a:ln w="19050">
-            <a:solidFill>
-              <a:srgbClr val="855A47"/>
-            </a:solidFill>
+            <a:noFill/>
             <a:prstDash val="dash"/>
           </a:ln>
         </p:spPr>
@@ -3758,7 +3888,7 @@
             <a:r>
               <a:rPr sz="1200" b="0" i="0">
                 <a:solidFill>
-                  <a:srgbClr val="422D24"/>
+                  <a:srgbClr val="8E8780"/>
                 </a:solidFill>
               </a:rPr>
               <a:t>사진</a:t>
@@ -3768,13 +3898,13 @@
       </p:sp>
       <p:sp>
         <p:nvSpPr>
-          <p:cNvPr id="9" name="TextBox 8"/>
+          <p:cNvPr id="10" name="TextBox 9"/>
           <p:cNvSpPr txBox="1"/>
           <p:nvPr/>
         </p:nvSpPr>
         <p:spPr>
           <a:xfrm>
-            <a:off x="6553047" y="4091939"/>
+            <a:off x="6553047" y="4160520"/>
             <a:ext cx="4998567" cy="411480"/>
           </a:xfrm>
           <a:prstGeom prst="rect">
@@ -3796,7 +3926,7 @@
             <a:r>
               <a:rPr sz="1600" b="1" i="0">
                 <a:solidFill>
-                  <a:srgbClr val="422D24"/>
+                  <a:srgbClr val="493127"/>
                 </a:solidFill>
               </a:rPr>
               <a:t>신부</a:t>
@@ -3806,14 +3936,14 @@
       </p:sp>
       <p:sp>
         <p:nvSpPr>
-          <p:cNvPr id="10" name="TextBox 9"/>
+          <p:cNvPr id="11" name="TextBox 10"/>
           <p:cNvSpPr txBox="1"/>
           <p:nvPr/>
         </p:nvSpPr>
         <p:spPr>
           <a:xfrm>
-            <a:off x="6644487" y="4549140"/>
-            <a:ext cx="4815687" cy="1851660"/>
+            <a:off x="6644487" y="4617720"/>
+            <a:ext cx="4815687" cy="1737360"/>
           </a:xfrm>
           <a:prstGeom prst="rect">
             <a:avLst/>
@@ -3886,7 +4016,7 @@
     <p:bg>
       <p:bgPr>
         <a:solidFill>
-          <a:srgbClr val="FFFFFF"/>
+          <a:srgbClr val="F6DFD5"/>
         </a:solidFill>
         <a:effectLst/>
       </p:bgPr>
@@ -3906,14 +4036,16 @@
         </p:nvSpPr>
         <p:spPr>
           <a:xfrm>
-            <a:off x="9905695" y="-1463040"/>
-            <a:ext cx="3840480" cy="3840480"/>
-          </a:xfrm>
-          <a:prstGeom prst="ellipse">
-            <a:avLst/>
+            <a:off x="640080" y="566928"/>
+            <a:ext cx="64008" cy="868680"/>
+          </a:xfrm>
+          <a:prstGeom prst="roundRect">
+            <a:avLst>
+              <a:gd name="adj" fmla="val 50000"/>
+            </a:avLst>
           </a:prstGeom>
           <a:solidFill>
-            <a:srgbClr val="EBDCD6"/>
+            <a:srgbClr val="D89579"/>
           </a:solidFill>
           <a:ln>
             <a:noFill/>
@@ -3929,20 +4061,58 @@
       </p:sp>
       <p:sp>
         <p:nvSpPr>
-          <p:cNvPr id="4" name="장식"/>
+          <p:cNvPr id="4" name="상단 라벨"/>
+          <p:cNvSpPr txBox="1"/>
+          <p:nvPr/>
+        </p:nvSpPr>
+        <p:spPr>
+          <a:xfrm>
+            <a:off x="868680" y="274320"/>
+            <a:ext cx="5486400" cy="274320"/>
+          </a:xfrm>
+          <a:prstGeom prst="rect">
+            <a:avLst/>
+          </a:prstGeom>
+          <a:noFill/>
+        </p:spPr>
+        <p:txBody>
+          <a:bodyPr wrap="square" lIns="54864" rIns="54864" tIns="27432" bIns="27432" anchor="ctr">
+            <a:noAutofit/>
+          </a:bodyPr>
+          <a:lstStyle/>
+          <a:p>
+            <a:pPr algn="l">
+              <a:lnSpc>
+                <a:spcPct val="115000"/>
+              </a:lnSpc>
+            </a:pPr>
+            <a:r>
+              <a:rPr sz="900" b="1" i="0" spc="250">
+                <a:solidFill>
+                  <a:srgbClr val="8E8780"/>
+                </a:solidFill>
+              </a:rPr>
+              <a:t>WEDDING</a:t>
+            </a:r>
+          </a:p>
+        </p:txBody>
+      </p:sp>
+      <p:sp>
+        <p:nvSpPr>
+          <p:cNvPr id="5" name="포인트"/>
           <p:cNvSpPr/>
           <p:nvPr/>
         </p:nvSpPr>
         <p:spPr>
           <a:xfrm>
-            <a:off x="11094415" y="274320"/>
-            <a:ext cx="411480" cy="411480"/>
-          </a:xfrm>
-          <a:prstGeom prst="ellipse">
+            <a:off x="11167567" y="667512"/>
+            <a:ext cx="310896" cy="310896"/>
+          </a:xfrm>
+          <a:prstGeom prst="donut">
             <a:avLst/>
           </a:prstGeom>
           <a:solidFill>
-            <a:srgbClr val="855A47"/>
+            <a:srgbClr val="EBC0AD"/>
           </a:solidFill>
           <a:ln>
             <a:noFill/>
@@ -3968,8 +4138,8 @@
         </p:nvSpPr>
         <p:spPr>
           <a:xfrm>
-            <a:off x="640080" y="457200"/>
-            <a:ext cx="9722815" cy="868680"/>
+            <a:off x="868680" y="566928"/>
+            <a:ext cx="9448495" cy="868680"/>
           </a:xfrm>
         </p:spPr>
         <p:txBody>
@@ -3986,7 +4156,7 @@
             <a:r>
               <a:rPr sz="3000" b="1" i="0">
                 <a:solidFill>
-                  <a:srgbClr val="422D24"/>
+                  <a:srgbClr val="26231F"/>
                 </a:solidFill>
               </a:rPr>
               <a:t>식순 안내</a:t>
@@ -3996,14 +4166,14 @@
       </p:sp>
       <p:graphicFrame>
         <p:nvGraphicFramePr>
-          <p:cNvPr id="5" name="표"/>
+          <p:cNvPr id="6" name="표"/>
           <p:cNvGraphicFramePr>
             <a:graphicFrameLocks noGrp="1"/>
           </p:cNvGraphicFramePr>
           <p:nvPr/>
         </p:nvGraphicFramePr>
         <p:xfrm>
-          <a:off x="640080" y="1600200"/>
+          <a:off x="640080" y="1783080"/>
           <a:ext cx="10911535" cy="3950208"/>
         </p:xfrm>
         <a:graphic>
@@ -4027,7 +4197,7 @@
                       <a:r>
                         <a:rPr sz="1500" b="1">
                           <a:solidFill>
-                            <a:srgbClr val="FFFFFF"/>
+                            <a:srgbClr val="26231F"/>
                           </a:solidFill>
                         </a:rPr>
                         <a:t>시간</a:t>
@@ -4037,30 +4207,30 @@
                   <a:tcPr anchor="ctr" marL="73152" marR="73152">
                     <a:lnL w="9525" cap="flat" cmpd="sng" algn="ctr">
                       <a:solidFill>
-                        <a:srgbClr val="855A47"/>
+                        <a:srgbClr val="D89579"/>
                       </a:solidFill>
                       <a:prstDash val="solid"/>
                     </a:lnL>
                     <a:lnR w="9525" cap="flat" cmpd="sng" algn="ctr">
                       <a:solidFill>
-                        <a:srgbClr val="855A47"/>
+                        <a:srgbClr val="D89579"/>
                       </a:solidFill>
                       <a:prstDash val="solid"/>
                     </a:lnR>
                     <a:lnT w="9525" cap="flat" cmpd="sng" algn="ctr">
                       <a:solidFill>
-                        <a:srgbClr val="855A47"/>
+                        <a:srgbClr val="D89579"/>
                       </a:solidFill>
                       <a:prstDash val="solid"/>
                     </a:lnT>
                     <a:lnB w="9525" cap="flat" cmpd="sng" algn="ctr">
                       <a:solidFill>
-                        <a:srgbClr val="855A47"/>
+                        <a:srgbClr val="D89579"/>
                       </a:solidFill>
                       <a:prstDash val="solid"/>
                     </a:lnB>
                     <a:solidFill>
-                      <a:srgbClr val="855A47"/>
+                      <a:srgbClr val="D89579"/>
                     </a:solidFill>
                   </a:tcPr>
                 </a:tc>
@@ -4073,7 +4243,7 @@
                       <a:r>
                         <a:rPr sz="1500" b="1">
                           <a:solidFill>
-                            <a:srgbClr val="FFFFFF"/>
+                            <a:srgbClr val="26231F"/>
                           </a:solidFill>
                         </a:rPr>
                         <a:t>순서</a:t>
@@ -4083,30 +4253,30 @@
                   <a:tcPr anchor="ctr" marL="73152" marR="73152">
                     <a:lnL w="9525" cap="flat" cmpd="sng" algn="ctr">
                       <a:solidFill>
-                        <a:srgbClr val="855A47"/>
+                        <a:srgbClr val="D89579"/>
                       </a:solidFill>
                       <a:prstDash val="solid"/>
                     </a:lnL>
                     <a:lnR w="9525" cap="flat" cmpd="sng" algn="ctr">
                       <a:solidFill>
-                        <a:srgbClr val="855A47"/>
+                        <a:srgbClr val="D89579"/>
                       </a:solidFill>
                       <a:prstDash val="solid"/>
                     </a:lnR>
                     <a:lnT w="9525" cap="flat" cmpd="sng" algn="ctr">
                       <a:solidFill>
-                        <a:srgbClr val="855A47"/>
+                        <a:srgbClr val="D89579"/>
                       </a:solidFill>
                       <a:prstDash val="solid"/>
                     </a:lnT>
                     <a:lnB w="9525" cap="flat" cmpd="sng" algn="ctr">
                       <a:solidFill>
-                        <a:srgbClr val="855A47"/>
+                        <a:srgbClr val="D89579"/>
                       </a:solidFill>
                       <a:prstDash val="solid"/>
                     </a:lnB>
                     <a:solidFill>
-                      <a:srgbClr val="855A47"/>
+                      <a:srgbClr val="D89579"/>
                     </a:solidFill>
                   </a:tcPr>
                 </a:tc>
@@ -4119,7 +4289,7 @@
                       <a:r>
                         <a:rPr sz="1500" b="1">
                           <a:solidFill>
-                            <a:srgbClr val="FFFFFF"/>
+                            <a:srgbClr val="26231F"/>
                           </a:solidFill>
                         </a:rPr>
                         <a:t>담당</a:t>
@@ -4129,30 +4299,30 @@
                   <a:tcPr anchor="ctr" marL="73152" marR="73152">
                     <a:lnL w="9525" cap="flat" cmpd="sng" algn="ctr">
                       <a:solidFill>
-                        <a:srgbClr val="855A47"/>
+                        <a:srgbClr val="D89579"/>
                       </a:solidFill>
                       <a:prstDash val="solid"/>
                     </a:lnL>
                     <a:lnR w="9525" cap="flat" cmpd="sng" algn="ctr">
                       <a:solidFill>
-                        <a:srgbClr val="855A47"/>
+                        <a:srgbClr val="D89579"/>
                       </a:solidFill>
                       <a:prstDash val="solid"/>
                     </a:lnR>
                     <a:lnT w="9525" cap="flat" cmpd="sng" algn="ctr">
                       <a:solidFill>
-                        <a:srgbClr val="855A47"/>
+                        <a:srgbClr val="D89579"/>
                       </a:solidFill>
                       <a:prstDash val="solid"/>
                     </a:lnT>
                     <a:lnB w="9525" cap="flat" cmpd="sng" algn="ctr">
                       <a:solidFill>
-                        <a:srgbClr val="855A47"/>
+                        <a:srgbClr val="D89579"/>
                       </a:solidFill>
                       <a:prstDash val="solid"/>
                     </a:lnB>
                     <a:solidFill>
-                      <a:srgbClr val="855A47"/>
+                      <a:srgbClr val="D89579"/>
                     </a:solidFill>
                   </a:tcPr>
                 </a:tc>
@@ -4167,7 +4337,7 @@
                       <a:r>
                         <a:rPr sz="1500" b="1">
                           <a:solidFill>
-                            <a:srgbClr val="422D24"/>
+                            <a:srgbClr val="493127"/>
                           </a:solidFill>
                         </a:rPr>
                         <a:t>00:00</a:t>
@@ -4177,30 +4347,30 @@
                   <a:tcPr anchor="ctr" marL="73152" marR="73152">
                     <a:lnL w="9525" cap="flat" cmpd="sng" algn="ctr">
                       <a:solidFill>
-                        <a:srgbClr val="EBDCD6"/>
+                        <a:srgbClr val="F6DFD5"/>
                       </a:solidFill>
                       <a:prstDash val="solid"/>
                     </a:lnL>
                     <a:lnR w="9525" cap="flat" cmpd="sng" algn="ctr">
                       <a:solidFill>
-                        <a:srgbClr val="EBDCD6"/>
+                        <a:srgbClr val="F6DFD5"/>
                       </a:solidFill>
                       <a:prstDash val="solid"/>
                     </a:lnR>
                     <a:lnT w="9525" cap="flat" cmpd="sng" algn="ctr">
                       <a:solidFill>
-                        <a:srgbClr val="EBDCD6"/>
+                        <a:srgbClr val="F6DFD5"/>
                       </a:solidFill>
                       <a:prstDash val="solid"/>
                     </a:lnT>
                     <a:lnB w="9525" cap="flat" cmpd="sng" algn="ctr">
                       <a:solidFill>
-                        <a:srgbClr val="EBDCD6"/>
+                        <a:srgbClr val="F6DFD5"/>
                       </a:solidFill>
                       <a:prstDash val="solid"/>
                     </a:lnB>
                     <a:solidFill>
-                      <a:srgbClr val="EBDCD6"/>
+                      <a:srgbClr val="F6DFD5"/>
                     </a:solidFill>
                   </a:tcPr>
                 </a:tc>
@@ -4213,7 +4383,7 @@
                       <a:r>
                         <a:rPr sz="1500" b="0">
                           <a:solidFill>
-                            <a:srgbClr val="2B2B2B"/>
+                            <a:srgbClr val="26231F"/>
                           </a:solidFill>
                         </a:rPr>
                         <a:t>하객 맞이</a:t>
@@ -4223,25 +4393,25 @@
                   <a:tcPr anchor="ctr" marL="73152" marR="73152">
                     <a:lnL w="9525" cap="flat" cmpd="sng" algn="ctr">
                       <a:solidFill>
-                        <a:srgbClr val="EBDCD6"/>
+                        <a:srgbClr val="F6DFD5"/>
                       </a:solidFill>
                       <a:prstDash val="solid"/>
                     </a:lnL>
                     <a:lnR w="9525" cap="flat" cmpd="sng" algn="ctr">
                       <a:solidFill>
-                        <a:srgbClr val="EBDCD6"/>
+                        <a:srgbClr val="F6DFD5"/>
                       </a:solidFill>
                       <a:prstDash val="solid"/>
                     </a:lnR>
                     <a:lnT w="9525" cap="flat" cmpd="sng" algn="ctr">
                       <a:solidFill>
-                        <a:srgbClr val="EBDCD6"/>
+                        <a:srgbClr val="F6DFD5"/>
                       </a:solidFill>
                       <a:prstDash val="solid"/>
                     </a:lnT>
                     <a:lnB w="9525" cap="flat" cmpd="sng" algn="ctr">
                       <a:solidFill>
-                        <a:srgbClr val="EBDCD6"/>
+                        <a:srgbClr val="F6DFD5"/>
                       </a:solidFill>
                       <a:prstDash val="solid"/>
                     </a:lnB>
@@ -4259,7 +4429,7 @@
                       <a:r>
                         <a:rPr sz="1500" b="0">
                           <a:solidFill>
-                            <a:srgbClr val="2B2B2B"/>
+                            <a:srgbClr val="26231F"/>
                           </a:solidFill>
                         </a:rPr>
                         <a:t/>
@@ -4269,25 +4439,25 @@
                   <a:tcPr anchor="ctr" marL="73152" marR="73152">
                     <a:lnL w="9525" cap="flat" cmpd="sng" algn="ctr">
                       <a:solidFill>
-                        <a:srgbClr val="EBDCD6"/>
+                        <a:srgbClr val="F6DFD5"/>
                       </a:solidFill>
                       <a:prstDash val="solid"/>
                     </a:lnL>
                     <a:lnR w="9525" cap="flat" cmpd="sng" algn="ctr">
                       <a:solidFill>
-                        <a:srgbClr val="EBDCD6"/>
+                        <a:srgbClr val="F6DFD5"/>
                       </a:solidFill>
                       <a:prstDash val="solid"/>
                     </a:lnR>
                     <a:lnT w="9525" cap="flat" cmpd="sng" algn="ctr">
                       <a:solidFill>
-                        <a:srgbClr val="EBDCD6"/>
+                        <a:srgbClr val="F6DFD5"/>
                       </a:solidFill>
                       <a:prstDash val="solid"/>
                     </a:lnT>
                     <a:lnB w="9525" cap="flat" cmpd="sng" algn="ctr">
                       <a:solidFill>
-                        <a:srgbClr val="EBDCD6"/>
+                        <a:srgbClr val="F6DFD5"/>
                       </a:solidFill>
                       <a:prstDash val="solid"/>
                     </a:lnB>
@@ -4307,7 +4477,7 @@
                       <a:r>
                         <a:rPr sz="1500" b="1">
                           <a:solidFill>
-                            <a:srgbClr val="422D24"/>
+                            <a:srgbClr val="493127"/>
                           </a:solidFill>
                         </a:rPr>
                         <a:t>00:00</a:t>
@@ -4317,30 +4487,30 @@
                   <a:tcPr anchor="ctr" marL="73152" marR="73152">
                     <a:lnL w="9525" cap="flat" cmpd="sng" algn="ctr">
                       <a:solidFill>
-                        <a:srgbClr val="EBDCD6"/>
+                        <a:srgbClr val="F6DFD5"/>
                       </a:solidFill>
                       <a:prstDash val="solid"/>
                     </a:lnL>
                     <a:lnR w="9525" cap="flat" cmpd="sng" algn="ctr">
                       <a:solidFill>
-                        <a:srgbClr val="EBDCD6"/>
+                        <a:srgbClr val="F6DFD5"/>
                       </a:solidFill>
                       <a:prstDash val="solid"/>
                     </a:lnR>
                     <a:lnT w="9525" cap="flat" cmpd="sng" algn="ctr">
                       <a:solidFill>
-                        <a:srgbClr val="EBDCD6"/>
+                        <a:srgbClr val="F6DFD5"/>
                       </a:solidFill>
                       <a:prstDash val="solid"/>
                     </a:lnT>
                     <a:lnB w="9525" cap="flat" cmpd="sng" algn="ctr">
                       <a:solidFill>
-                        <a:srgbClr val="EBDCD6"/>
+                        <a:srgbClr val="F6DFD5"/>
                       </a:solidFill>
                       <a:prstDash val="solid"/>
                     </a:lnB>
                     <a:solidFill>
-                      <a:srgbClr val="EBDCD6"/>
+                      <a:srgbClr val="F6DFD5"/>
                     </a:solidFill>
                   </a:tcPr>
                 </a:tc>
@@ -4353,7 +4523,7 @@
                       <a:r>
                         <a:rPr sz="1500" b="0">
                           <a:solidFill>
-                            <a:srgbClr val="2B2B2B"/>
+                            <a:srgbClr val="26231F"/>
                           </a:solidFill>
                         </a:rPr>
                         <a:t>신랑 · 신부 입장</a:t>
@@ -4363,30 +4533,30 @@
                   <a:tcPr anchor="ctr" marL="73152" marR="73152">
                     <a:lnL w="9525" cap="flat" cmpd="sng" algn="ctr">
                       <a:solidFill>
-                        <a:srgbClr val="EBDCD6"/>
+                        <a:srgbClr val="F6DFD5"/>
                       </a:solidFill>
                       <a:prstDash val="solid"/>
                     </a:lnL>
                     <a:lnR w="9525" cap="flat" cmpd="sng" algn="ctr">
                       <a:solidFill>
-                        <a:srgbClr val="EBDCD6"/>
+                        <a:srgbClr val="F6DFD5"/>
                       </a:solidFill>
                       <a:prstDash val="solid"/>
                     </a:lnR>
                     <a:lnT w="9525" cap="flat" cmpd="sng" algn="ctr">
                       <a:solidFill>
-                        <a:srgbClr val="EBDCD6"/>
+                        <a:srgbClr val="F6DFD5"/>
                       </a:solidFill>
                       <a:prstDash val="solid"/>
                     </a:lnT>
                     <a:lnB w="9525" cap="flat" cmpd="sng" algn="ctr">
                       <a:solidFill>
-                        <a:srgbClr val="EBDCD6"/>
+                        <a:srgbClr val="F6DFD5"/>
                       </a:solidFill>
                       <a:prstDash val="solid"/>
                     </a:lnB>
                     <a:solidFill>
-                      <a:srgbClr val="F8F4F2"/>
+                      <a:srgbClr val="FBF1EC"/>
                     </a:solidFill>
                   </a:tcPr>
                 </a:tc>
@@ -4399,7 +4569,7 @@
                       <a:r>
                         <a:rPr sz="1500" b="0">
                           <a:solidFill>
-                            <a:srgbClr val="2B2B2B"/>
+                            <a:srgbClr val="26231F"/>
                           </a:solidFill>
                         </a:rPr>
                         <a:t/>
@@ -4409,30 +4579,30 @@
                   <a:tcPr anchor="ctr" marL="73152" marR="73152">
                     <a:lnL w="9525" cap="flat" cmpd="sng" algn="ctr">
                       <a:solidFill>
-                        <a:srgbClr val="EBDCD6"/>
+                        <a:srgbClr val="F6DFD5"/>
                       </a:solidFill>
                       <a:prstDash val="solid"/>
                     </a:lnL>
                     <a:lnR w="9525" cap="flat" cmpd="sng" algn="ctr">
                       <a:solidFill>
-                        <a:srgbClr val="EBDCD6"/>
+                        <a:srgbClr val="F6DFD5"/>
                       </a:solidFill>
                       <a:prstDash val="solid"/>
                     </a:lnR>
                     <a:lnT w="9525" cap="flat" cmpd="sng" algn="ctr">
                       <a:solidFill>
-                        <a:srgbClr val="EBDCD6"/>
+                        <a:srgbClr val="F6DFD5"/>
                       </a:solidFill>
                       <a:prstDash val="solid"/>
                     </a:lnT>
                     <a:lnB w="9525" cap="flat" cmpd="sng" algn="ctr">
                       <a:solidFill>
-                        <a:srgbClr val="EBDCD6"/>
+                        <a:srgbClr val="F6DFD5"/>
                       </a:solidFill>
                       <a:prstDash val="solid"/>
                     </a:lnB>
                     <a:solidFill>
-                      <a:srgbClr val="F8F4F2"/>
+                      <a:srgbClr val="FBF1EC"/>
                     </a:solidFill>
                   </a:tcPr>
                 </a:tc>
@@ -4447,7 +4617,7 @@
                       <a:r>
                         <a:rPr sz="1500" b="1">
                           <a:solidFill>
-                            <a:srgbClr val="422D24"/>
+                            <a:srgbClr val="493127"/>
                           </a:solidFill>
                         </a:rPr>
                         <a:t>00:00</a:t>
@@ -4457,30 +4627,30 @@
                   <a:tcPr anchor="ctr" marL="73152" marR="73152">
                     <a:lnL w="9525" cap="flat" cmpd="sng" algn="ctr">
                       <a:solidFill>
-                        <a:srgbClr val="EBDCD6"/>
+                        <a:srgbClr val="F6DFD5"/>
                       </a:solidFill>
                       <a:prstDash val="solid"/>
                     </a:lnL>
                     <a:lnR w="9525" cap="flat" cmpd="sng" algn="ctr">
                       <a:solidFill>
-                        <a:srgbClr val="EBDCD6"/>
+                        <a:srgbClr val="F6DFD5"/>
                       </a:solidFill>
                       <a:prstDash val="solid"/>
                     </a:lnR>
                     <a:lnT w="9525" cap="flat" cmpd="sng" algn="ctr">
                       <a:solidFill>
-                        <a:srgbClr val="EBDCD6"/>
+                        <a:srgbClr val="F6DFD5"/>
                       </a:solidFill>
                       <a:prstDash val="solid"/>
                     </a:lnT>
                     <a:lnB w="9525" cap="flat" cmpd="sng" algn="ctr">
                       <a:solidFill>
-                        <a:srgbClr val="EBDCD6"/>
+                        <a:srgbClr val="F6DFD5"/>
                       </a:solidFill>
                       <a:prstDash val="solid"/>
                     </a:lnB>
                     <a:solidFill>
-                      <a:srgbClr val="EBDCD6"/>
+                      <a:srgbClr val="F6DFD5"/>
                     </a:solidFill>
                   </a:tcPr>
                 </a:tc>
@@ -4493,7 +4663,7 @@
                       <a:r>
                         <a:rPr sz="1500" b="0">
                           <a:solidFill>
-                            <a:srgbClr val="2B2B2B"/>
+                            <a:srgbClr val="26231F"/>
                           </a:solidFill>
                         </a:rPr>
                         <a:t>혼인 서약</a:t>
@@ -4503,25 +4673,25 @@
                   <a:tcPr anchor="ctr" marL="73152" marR="73152">
                     <a:lnL w="9525" cap="flat" cmpd="sng" algn="ctr">
                       <a:solidFill>
-                        <a:srgbClr val="EBDCD6"/>
+                        <a:srgbClr val="F6DFD5"/>
                       </a:solidFill>
                       <a:prstDash val="solid"/>
                     </a:lnL>
                     <a:lnR w="9525" cap="flat" cmpd="sng" algn="ctr">
                       <a:solidFill>
-                        <a:srgbClr val="EBDCD6"/>
+                        <a:srgbClr val="F6DFD5"/>
                       </a:solidFill>
                       <a:prstDash val="solid"/>
                     </a:lnR>
                     <a:lnT w="9525" cap="flat" cmpd="sng" algn="ctr">
                       <a:solidFill>
-                        <a:srgbClr val="EBDCD6"/>
+                        <a:srgbClr val="F6DFD5"/>
                       </a:solidFill>
                       <a:prstDash val="solid"/>
                     </a:lnT>
                     <a:lnB w="9525" cap="flat" cmpd="sng" algn="ctr">
                       <a:solidFill>
-                        <a:srgbClr val="EBDCD6"/>
+                        <a:srgbClr val="F6DFD5"/>
                       </a:solidFill>
                       <a:prstDash val="solid"/>
                     </a:lnB>
@@ -4539,7 +4709,7 @@
                       <a:r>
                         <a:rPr sz="1500" b="0">
                           <a:solidFill>
-                            <a:srgbClr val="2B2B2B"/>
+                            <a:srgbClr val="26231F"/>
                           </a:solidFill>
                         </a:rPr>
                         <a:t/>
@@ -4549,25 +4719,25 @@
                   <a:tcPr anchor="ctr" marL="73152" marR="73152">
                     <a:lnL w="9525" cap="flat" cmpd="sng" algn="ctr">
                       <a:solidFill>
-                        <a:srgbClr val="EBDCD6"/>
+                        <a:srgbClr val="F6DFD5"/>
                       </a:solidFill>
                       <a:prstDash val="solid"/>
                     </a:lnL>
                     <a:lnR w="9525" cap="flat" cmpd="sng" algn="ctr">
                       <a:solidFill>
-                        <a:srgbClr val="EBDCD6"/>
+                        <a:srgbClr val="F6DFD5"/>
                       </a:solidFill>
                       <a:prstDash val="solid"/>
                     </a:lnR>
                     <a:lnT w="9525" cap="flat" cmpd="sng" algn="ctr">
                       <a:solidFill>
-                        <a:srgbClr val="EBDCD6"/>
+                        <a:srgbClr val="F6DFD5"/>
                       </a:solidFill>
                       <a:prstDash val="solid"/>
                     </a:lnT>
                     <a:lnB w="9525" cap="flat" cmpd="sng" algn="ctr">
                       <a:solidFill>
-                        <a:srgbClr val="EBDCD6"/>
+                        <a:srgbClr val="F6DFD5"/>
                       </a:solidFill>
                       <a:prstDash val="solid"/>
                     </a:lnB>
@@ -4587,7 +4757,7 @@
                       <a:r>
                         <a:rPr sz="1500" b="1">
                           <a:solidFill>
-                            <a:srgbClr val="422D24"/>
+                            <a:srgbClr val="493127"/>
                           </a:solidFill>
                         </a:rPr>
                         <a:t>00:00</a:t>
@@ -4597,30 +4767,30 @@
                   <a:tcPr anchor="ctr" marL="73152" marR="73152">
                     <a:lnL w="9525" cap="flat" cmpd="sng" algn="ctr">
                       <a:solidFill>
-                        <a:srgbClr val="EBDCD6"/>
+                        <a:srgbClr val="F6DFD5"/>
                       </a:solidFill>
                       <a:prstDash val="solid"/>
                     </a:lnL>
                     <a:lnR w="9525" cap="flat" cmpd="sng" algn="ctr">
                       <a:solidFill>
-                        <a:srgbClr val="EBDCD6"/>
+                        <a:srgbClr val="F6DFD5"/>
                       </a:solidFill>
                       <a:prstDash val="solid"/>
                     </a:lnR>
                     <a:lnT w="9525" cap="flat" cmpd="sng" algn="ctr">
                       <a:solidFill>
-                        <a:srgbClr val="EBDCD6"/>
+                        <a:srgbClr val="F6DFD5"/>
                       </a:solidFill>
                       <a:prstDash val="solid"/>
                     </a:lnT>
                     <a:lnB w="9525" cap="flat" cmpd="sng" algn="ctr">
                       <a:solidFill>
-                        <a:srgbClr val="EBDCD6"/>
+                        <a:srgbClr val="F6DFD5"/>
                       </a:solidFill>
                       <a:prstDash val="solid"/>
                     </a:lnB>
                     <a:solidFill>
-                      <a:srgbClr val="EBDCD6"/>
+                      <a:srgbClr val="F6DFD5"/>
                     </a:solidFill>
                   </a:tcPr>
                 </a:tc>
@@ -4633,7 +4803,7 @@
                       <a:r>
                         <a:rPr sz="1500" b="0">
                           <a:solidFill>
-                            <a:srgbClr val="2B2B2B"/>
+                            <a:srgbClr val="26231F"/>
                           </a:solidFill>
                         </a:rPr>
                         <a:t>축가 · 감사 인사</a:t>
@@ -4643,30 +4813,30 @@
                   <a:tcPr anchor="ctr" marL="73152" marR="73152">
                     <a:lnL w="9525" cap="flat" cmpd="sng" algn="ctr">
                       <a:solidFill>
-                        <a:srgbClr val="EBDCD6"/>
+                        <a:srgbClr val="F6DFD5"/>
                       </a:solidFill>
                       <a:prstDash val="solid"/>
                     </a:lnL>
                     <a:lnR w="9525" cap="flat" cmpd="sng" algn="ctr">
                       <a:solidFill>
-                        <a:srgbClr val="EBDCD6"/>
+                        <a:srgbClr val="F6DFD5"/>
                       </a:solidFill>
                       <a:prstDash val="solid"/>
                     </a:lnR>
                     <a:lnT w="9525" cap="flat" cmpd="sng" algn="ctr">
                       <a:solidFill>
-                        <a:srgbClr val="EBDCD6"/>
+                        <a:srgbClr val="F6DFD5"/>
                       </a:solidFill>
                       <a:prstDash val="solid"/>
                     </a:lnT>
                     <a:lnB w="9525" cap="flat" cmpd="sng" algn="ctr">
                       <a:solidFill>
-                        <a:srgbClr val="EBDCD6"/>
+                        <a:srgbClr val="F6DFD5"/>
                       </a:solidFill>
                       <a:prstDash val="solid"/>
                     </a:lnB>
                     <a:solidFill>
-                      <a:srgbClr val="F8F4F2"/>
+                      <a:srgbClr val="FBF1EC"/>
                     </a:solidFill>
                   </a:tcPr>
                 </a:tc>
@@ -4679,7 +4849,7 @@
                       <a:r>
                         <a:rPr sz="1500" b="0">
                           <a:solidFill>
-                            <a:srgbClr val="2B2B2B"/>
+                            <a:srgbClr val="26231F"/>
                           </a:solidFill>
                         </a:rPr>
                         <a:t/>
@@ -4689,30 +4859,30 @@
                   <a:tcPr anchor="ctr" marL="73152" marR="73152">
                     <a:lnL w="9525" cap="flat" cmpd="sng" algn="ctr">
                       <a:solidFill>
-                        <a:srgbClr val="EBDCD6"/>
+                        <a:srgbClr val="F6DFD5"/>
                       </a:solidFill>
                       <a:prstDash val="solid"/>
                     </a:lnL>
                     <a:lnR w="9525" cap="flat" cmpd="sng" algn="ctr">
                       <a:solidFill>
-                        <a:srgbClr val="EBDCD6"/>
+                        <a:srgbClr val="F6DFD5"/>
                       </a:solidFill>
                       <a:prstDash val="solid"/>
                     </a:lnR>
                     <a:lnT w="9525" cap="flat" cmpd="sng" algn="ctr">
                       <a:solidFill>
-                        <a:srgbClr val="EBDCD6"/>
+                        <a:srgbClr val="F6DFD5"/>
                       </a:solidFill>
                       <a:prstDash val="solid"/>
                     </a:lnT>
                     <a:lnB w="9525" cap="flat" cmpd="sng" algn="ctr">
                       <a:solidFill>
-                        <a:srgbClr val="EBDCD6"/>
+                        <a:srgbClr val="F6DFD5"/>
                       </a:solidFill>
                       <a:prstDash val="solid"/>
                     </a:lnB>
                     <a:solidFill>
-                      <a:srgbClr val="F8F4F2"/>
+                      <a:srgbClr val="FBF1EC"/>
                     </a:solidFill>
                   </a:tcPr>
                 </a:tc>
@@ -4727,7 +4897,7 @@
                       <a:r>
                         <a:rPr sz="1500" b="1">
                           <a:solidFill>
-                            <a:srgbClr val="422D24"/>
+                            <a:srgbClr val="493127"/>
                           </a:solidFill>
                         </a:rPr>
                         <a:t>00:00</a:t>
@@ -4737,30 +4907,30 @@
                   <a:tcPr anchor="ctr" marL="73152" marR="73152">
                     <a:lnL w="9525" cap="flat" cmpd="sng" algn="ctr">
                       <a:solidFill>
-                        <a:srgbClr val="EBDCD6"/>
+                        <a:srgbClr val="F6DFD5"/>
                       </a:solidFill>
                       <a:prstDash val="solid"/>
                     </a:lnL>
                     <a:lnR w="9525" cap="flat" cmpd="sng" algn="ctr">
                       <a:solidFill>
-                        <a:srgbClr val="EBDCD6"/>
+                        <a:srgbClr val="F6DFD5"/>
                       </a:solidFill>
                       <a:prstDash val="solid"/>
                     </a:lnR>
                     <a:lnT w="9525" cap="flat" cmpd="sng" algn="ctr">
                       <a:solidFill>
-                        <a:srgbClr val="EBDCD6"/>
+                        <a:srgbClr val="F6DFD5"/>
                       </a:solidFill>
                       <a:prstDash val="solid"/>
                     </a:lnT>
                     <a:lnB w="9525" cap="flat" cmpd="sng" algn="ctr">
                       <a:solidFill>
-                        <a:srgbClr val="EBDCD6"/>
+                        <a:srgbClr val="F6DFD5"/>
                       </a:solidFill>
                       <a:prstDash val="solid"/>
                     </a:lnB>
                     <a:solidFill>
-                      <a:srgbClr val="EBDCD6"/>
+                      <a:srgbClr val="F6DFD5"/>
                     </a:solidFill>
                   </a:tcPr>
                 </a:tc>
@@ -4773,7 +4943,7 @@
                       <a:r>
                         <a:rPr sz="1500" b="0">
                           <a:solidFill>
-                            <a:srgbClr val="2B2B2B"/>
+                            <a:srgbClr val="26231F"/>
                           </a:solidFill>
                         </a:rPr>
                         <a:t>기념 촬영 · 식사</a:t>
@@ -4783,25 +4953,25 @@
                   <a:tcPr anchor="ctr" marL="73152" marR="73152">
                     <a:lnL w="9525" cap="flat" cmpd="sng" algn="ctr">
                       <a:solidFill>
-                        <a:srgbClr val="EBDCD6"/>
+                        <a:srgbClr val="F6DFD5"/>
                       </a:solidFill>
                       <a:prstDash val="solid"/>
                     </a:lnL>
                     <a:lnR w="9525" cap="flat" cmpd="sng" algn="ctr">
                       <a:solidFill>
-                        <a:srgbClr val="EBDCD6"/>
+                        <a:srgbClr val="F6DFD5"/>
                       </a:solidFill>
                       <a:prstDash val="solid"/>
                     </a:lnR>
                     <a:lnT w="9525" cap="flat" cmpd="sng" algn="ctr">
                       <a:solidFill>
-                        <a:srgbClr val="EBDCD6"/>
+                        <a:srgbClr val="F6DFD5"/>
                       </a:solidFill>
                       <a:prstDash val="solid"/>
                     </a:lnT>
                     <a:lnB w="9525" cap="flat" cmpd="sng" algn="ctr">
                       <a:solidFill>
-                        <a:srgbClr val="EBDCD6"/>
+                        <a:srgbClr val="F6DFD5"/>
                       </a:solidFill>
                       <a:prstDash val="solid"/>
                     </a:lnB>
@@ -4819,7 +4989,7 @@
                       <a:r>
                         <a:rPr sz="1500" b="0">
                           <a:solidFill>
-                            <a:srgbClr val="2B2B2B"/>
+                            <a:srgbClr val="26231F"/>
                           </a:solidFill>
                         </a:rPr>
                         <a:t/>
@@ -4829,25 +4999,25 @@
                   <a:tcPr anchor="ctr" marL="73152" marR="73152">
                     <a:lnL w="9525" cap="flat" cmpd="sng" algn="ctr">
                       <a:solidFill>
-                        <a:srgbClr val="EBDCD6"/>
+                        <a:srgbClr val="F6DFD5"/>
                       </a:solidFill>
                       <a:prstDash val="solid"/>
                     </a:lnL>
                     <a:lnR w="9525" cap="flat" cmpd="sng" algn="ctr">
                       <a:solidFill>
-                        <a:srgbClr val="EBDCD6"/>
+                        <a:srgbClr val="F6DFD5"/>
                       </a:solidFill>
                       <a:prstDash val="solid"/>
                     </a:lnR>
                     <a:lnT w="9525" cap="flat" cmpd="sng" algn="ctr">
                       <a:solidFill>
-                        <a:srgbClr val="EBDCD6"/>
+                        <a:srgbClr val="F6DFD5"/>
                       </a:solidFill>
                       <a:prstDash val="solid"/>
                     </a:lnT>
                     <a:lnB w="9525" cap="flat" cmpd="sng" algn="ctr">
                       <a:solidFill>
-                        <a:srgbClr val="EBDCD6"/>
+                        <a:srgbClr val="F6DFD5"/>
                       </a:solidFill>
                       <a:prstDash val="solid"/>
                     </a:lnB>
@@ -4875,7 +5045,7 @@
     <p:bg>
       <p:bgPr>
         <a:solidFill>
-          <a:srgbClr val="FFFFFF"/>
+          <a:srgbClr val="F6DFD5"/>
         </a:solidFill>
         <a:effectLst/>
       </p:bgPr>
@@ -4895,14 +5065,16 @@
         </p:nvSpPr>
         <p:spPr>
           <a:xfrm>
-            <a:off x="9905695" y="-1463040"/>
-            <a:ext cx="3840480" cy="3840480"/>
-          </a:xfrm>
-          <a:prstGeom prst="ellipse">
-            <a:avLst/>
+            <a:off x="640080" y="566928"/>
+            <a:ext cx="64008" cy="868680"/>
+          </a:xfrm>
+          <a:prstGeom prst="roundRect">
+            <a:avLst>
+              <a:gd name="adj" fmla="val 50000"/>
+            </a:avLst>
           </a:prstGeom>
           <a:solidFill>
-            <a:srgbClr val="EBDCD6"/>
+            <a:srgbClr val="D89579"/>
           </a:solidFill>
           <a:ln>
             <a:noFill/>
@@ -4918,20 +5090,58 @@
       </p:sp>
       <p:sp>
         <p:nvSpPr>
-          <p:cNvPr id="4" name="장식"/>
+          <p:cNvPr id="4" name="상단 라벨"/>
+          <p:cNvSpPr txBox="1"/>
+          <p:nvPr/>
+        </p:nvSpPr>
+        <p:spPr>
+          <a:xfrm>
+            <a:off x="868680" y="274320"/>
+            <a:ext cx="5486400" cy="274320"/>
+          </a:xfrm>
+          <a:prstGeom prst="rect">
+            <a:avLst/>
+          </a:prstGeom>
+          <a:noFill/>
+        </p:spPr>
+        <p:txBody>
+          <a:bodyPr wrap="square" lIns="54864" rIns="54864" tIns="27432" bIns="27432" anchor="ctr">
+            <a:noAutofit/>
+          </a:bodyPr>
+          <a:lstStyle/>
+          <a:p>
+            <a:pPr algn="l">
+              <a:lnSpc>
+                <a:spcPct val="115000"/>
+              </a:lnSpc>
+            </a:pPr>
+            <a:r>
+              <a:rPr sz="900" b="1" i="0" spc="250">
+                <a:solidFill>
+                  <a:srgbClr val="8E8780"/>
+                </a:solidFill>
+              </a:rPr>
+              <a:t>WEDDING</a:t>
+            </a:r>
+          </a:p>
+        </p:txBody>
+      </p:sp>
+      <p:sp>
+        <p:nvSpPr>
+          <p:cNvPr id="5" name="포인트"/>
           <p:cNvSpPr/>
           <p:nvPr/>
         </p:nvSpPr>
         <p:spPr>
           <a:xfrm>
-            <a:off x="11094415" y="274320"/>
-            <a:ext cx="411480" cy="411480"/>
-          </a:xfrm>
-          <a:prstGeom prst="ellipse">
+            <a:off x="11167567" y="667512"/>
+            <a:ext cx="310896" cy="310896"/>
+          </a:xfrm>
+          <a:prstGeom prst="donut">
             <a:avLst/>
           </a:prstGeom>
           <a:solidFill>
-            <a:srgbClr val="855A47"/>
+            <a:srgbClr val="EBC0AD"/>
           </a:solidFill>
           <a:ln>
             <a:noFill/>
@@ -4957,8 +5167,8 @@
         </p:nvSpPr>
         <p:spPr>
           <a:xfrm>
-            <a:off x="640080" y="457200"/>
-            <a:ext cx="9722815" cy="868680"/>
+            <a:off x="868680" y="566928"/>
+            <a:ext cx="9448495" cy="868680"/>
           </a:xfrm>
         </p:spPr>
         <p:txBody>
@@ -4975,7 +5185,7 @@
             <a:r>
               <a:rPr sz="3000" b="1" i="0">
                 <a:solidFill>
-                  <a:srgbClr val="422D24"/>
+                  <a:srgbClr val="26231F"/>
                 </a:solidFill>
               </a:rPr>
               <a:t>하객 안내</a:t>
@@ -4985,27 +5195,25 @@
       </p:sp>
       <p:sp>
         <p:nvSpPr>
-          <p:cNvPr id="5" name="카드 1"/>
+          <p:cNvPr id="6" name="카드 1"/>
           <p:cNvSpPr/>
           <p:nvPr/>
         </p:nvSpPr>
         <p:spPr>
           <a:xfrm>
-            <a:off x="640080" y="1600200"/>
-            <a:ext cx="3484778" cy="4800600"/>
+            <a:off x="640080" y="1783080"/>
+            <a:ext cx="3484778" cy="4572000"/>
           </a:xfrm>
           <a:prstGeom prst="roundRect">
             <a:avLst>
-              <a:gd name="adj" fmla="val 8000"/>
+              <a:gd name="adj" fmla="val 7000"/>
             </a:avLst>
           </a:prstGeom>
           <a:solidFill>
-            <a:srgbClr val="F8F4F2"/>
+            <a:srgbClr val="FBF1EC"/>
           </a:solidFill>
-          <a:ln w="15875">
-            <a:solidFill>
-              <a:srgbClr val="EBDCD6"/>
-            </a:solidFill>
+          <a:ln>
+            <a:noFill/>
           </a:ln>
         </p:spPr>
         <p:txBody>
@@ -5018,23 +5226,23 @@
       </p:sp>
       <p:sp>
         <p:nvSpPr>
-          <p:cNvPr id="6" name="번호 1"/>
+          <p:cNvPr id="7" name="번호 1"/>
           <p:cNvSpPr/>
           <p:nvPr/>
         </p:nvSpPr>
         <p:spPr>
           <a:xfrm>
-            <a:off x="822959" y="1783080"/>
+            <a:off x="822959" y="1965960"/>
             <a:ext cx="457200" cy="457200"/>
           </a:xfrm>
           <a:prstGeom prst="ellipse">
             <a:avLst/>
           </a:prstGeom>
-          <a:solidFill>
-            <a:srgbClr val="855A47"/>
-          </a:solidFill>
-          <a:ln>
-            <a:noFill/>
+          <a:noFill/>
+          <a:ln w="19050">
+            <a:solidFill>
+              <a:srgbClr val="D89579"/>
+            </a:solidFill>
           </a:ln>
         </p:spPr>
         <p:txBody>
@@ -5051,7 +5259,7 @@
             <a:r>
               <a:rPr sz="1600" b="1" i="0">
                 <a:solidFill>
-                  <a:srgbClr val="FFFFFF"/>
+                  <a:srgbClr val="493127"/>
                 </a:solidFill>
               </a:rPr>
               <a:t>1</a:t>
@@ -5061,13 +5269,13 @@
       </p:sp>
       <p:sp>
         <p:nvSpPr>
-          <p:cNvPr id="7" name="TextBox 6"/>
+          <p:cNvPr id="8" name="TextBox 7"/>
           <p:cNvSpPr txBox="1"/>
           <p:nvPr/>
         </p:nvSpPr>
         <p:spPr>
           <a:xfrm>
-            <a:off x="777240" y="2377440"/>
+            <a:off x="777240" y="2560320"/>
             <a:ext cx="3210458" cy="640080"/>
           </a:xfrm>
           <a:prstGeom prst="rect">
@@ -5089,7 +5297,7 @@
             <a:r>
               <a:rPr sz="1800" b="1" i="0">
                 <a:solidFill>
-                  <a:srgbClr val="422D24"/>
+                  <a:srgbClr val="493127"/>
                 </a:solidFill>
               </a:rPr>
               <a:t>주차 안내</a:t>
@@ -5099,14 +5307,14 @@
       </p:sp>
       <p:sp>
         <p:nvSpPr>
-          <p:cNvPr id="8" name="TextBox 7"/>
+          <p:cNvPr id="9" name="TextBox 8"/>
           <p:cNvSpPr txBox="1"/>
           <p:nvPr/>
         </p:nvSpPr>
         <p:spPr>
           <a:xfrm>
-            <a:off x="777240" y="3063240"/>
-            <a:ext cx="3210458" cy="3200400"/>
+            <a:off x="777240" y="3246120"/>
+            <a:ext cx="3210458" cy="2971800"/>
           </a:xfrm>
           <a:prstGeom prst="rect">
             <a:avLst/>
@@ -5127,7 +5335,7 @@
             <a:r>
               <a:rPr sz="1500" b="0" i="0">
                 <a:solidFill>
-                  <a:srgbClr val="2B2B2B"/>
+                  <a:srgbClr val="26231F"/>
                 </a:solidFill>
               </a:rPr>
               <a:t>입력하세요</a:t>
@@ -5137,27 +5345,25 @@
       </p:sp>
       <p:sp>
         <p:nvSpPr>
-          <p:cNvPr id="9" name="카드 2"/>
+          <p:cNvPr id="10" name="카드 2"/>
           <p:cNvSpPr/>
           <p:nvPr/>
         </p:nvSpPr>
         <p:spPr>
           <a:xfrm>
-            <a:off x="4353458" y="1600200"/>
-            <a:ext cx="3484778" cy="4800600"/>
+            <a:off x="4353458" y="1783080"/>
+            <a:ext cx="3484778" cy="4572000"/>
           </a:xfrm>
           <a:prstGeom prst="roundRect">
             <a:avLst>
-              <a:gd name="adj" fmla="val 8000"/>
+              <a:gd name="adj" fmla="val 7000"/>
             </a:avLst>
           </a:prstGeom>
           <a:solidFill>
-            <a:srgbClr val="F8F4F2"/>
+            <a:srgbClr val="FBF1EC"/>
           </a:solidFill>
-          <a:ln w="15875">
-            <a:solidFill>
-              <a:srgbClr val="EBDCD6"/>
-            </a:solidFill>
+          <a:ln>
+            <a:noFill/>
           </a:ln>
         </p:spPr>
         <p:txBody>
@@ -5170,23 +5376,23 @@
       </p:sp>
       <p:sp>
         <p:nvSpPr>
-          <p:cNvPr id="10" name="번호 2"/>
+          <p:cNvPr id="11" name="번호 2"/>
           <p:cNvSpPr/>
           <p:nvPr/>
         </p:nvSpPr>
         <p:spPr>
           <a:xfrm>
-            <a:off x="4536338" y="1783080"/>
+            <a:off x="4536338" y="1965960"/>
             <a:ext cx="457200" cy="457200"/>
           </a:xfrm>
           <a:prstGeom prst="ellipse">
             <a:avLst/>
           </a:prstGeom>
-          <a:solidFill>
-            <a:srgbClr val="855A47"/>
-          </a:solidFill>
-          <a:ln>
-            <a:noFill/>
+          <a:noFill/>
+          <a:ln w="19050">
+            <a:solidFill>
+              <a:srgbClr val="D89579"/>
+            </a:solidFill>
           </a:ln>
         </p:spPr>
         <p:txBody>
@@ -5203,7 +5409,7 @@
             <a:r>
               <a:rPr sz="1600" b="1" i="0">
                 <a:solidFill>
-                  <a:srgbClr val="FFFFFF"/>
+                  <a:srgbClr val="493127"/>
                 </a:solidFill>
               </a:rPr>
               <a:t>2</a:t>
@@ -5213,13 +5419,13 @@
       </p:sp>
       <p:sp>
         <p:nvSpPr>
-          <p:cNvPr id="11" name="TextBox 10"/>
+          <p:cNvPr id="12" name="TextBox 11"/>
           <p:cNvSpPr txBox="1"/>
           <p:nvPr/>
         </p:nvSpPr>
         <p:spPr>
           <a:xfrm>
-            <a:off x="4490618" y="2377440"/>
+            <a:off x="4490618" y="2560320"/>
             <a:ext cx="3210458" cy="640080"/>
           </a:xfrm>
           <a:prstGeom prst="rect">
@@ -5241,7 +5447,7 @@
             <a:r>
               <a:rPr sz="1800" b="1" i="0">
                 <a:solidFill>
-                  <a:srgbClr val="422D24"/>
+                  <a:srgbClr val="493127"/>
                 </a:solidFill>
               </a:rPr>
               <a:t>식사 안내</a:t>
@@ -5251,14 +5457,14 @@
       </p:sp>
       <p:sp>
         <p:nvSpPr>
-          <p:cNvPr id="12" name="TextBox 11"/>
+          <p:cNvPr id="13" name="TextBox 12"/>
           <p:cNvSpPr txBox="1"/>
           <p:nvPr/>
         </p:nvSpPr>
         <p:spPr>
           <a:xfrm>
-            <a:off x="4490618" y="3063240"/>
-            <a:ext cx="3210458" cy="3200400"/>
+            <a:off x="4490618" y="3246120"/>
+            <a:ext cx="3210458" cy="2971800"/>
           </a:xfrm>
           <a:prstGeom prst="rect">
             <a:avLst/>
@@ -5279,7 +5485,7 @@
             <a:r>
               <a:rPr sz="1500" b="0" i="0">
                 <a:solidFill>
-                  <a:srgbClr val="2B2B2B"/>
+                  <a:srgbClr val="26231F"/>
                 </a:solidFill>
               </a:rPr>
               <a:t>입력하세요</a:t>
@@ -5289,27 +5495,25 @@
       </p:sp>
       <p:sp>
         <p:nvSpPr>
-          <p:cNvPr id="13" name="카드 3"/>
+          <p:cNvPr id="14" name="카드 3"/>
           <p:cNvSpPr/>
           <p:nvPr/>
         </p:nvSpPr>
         <p:spPr>
           <a:xfrm>
-            <a:off x="8066836" y="1600200"/>
-            <a:ext cx="3484778" cy="4800600"/>
+            <a:off x="8066836" y="1783080"/>
+            <a:ext cx="3484778" cy="4572000"/>
           </a:xfrm>
           <a:prstGeom prst="roundRect">
             <a:avLst>
-              <a:gd name="adj" fmla="val 8000"/>
+              <a:gd name="adj" fmla="val 7000"/>
             </a:avLst>
           </a:prstGeom>
           <a:solidFill>
-            <a:srgbClr val="F8F4F2"/>
+            <a:srgbClr val="FBF1EC"/>
           </a:solidFill>
-          <a:ln w="15875">
-            <a:solidFill>
-              <a:srgbClr val="EBDCD6"/>
-            </a:solidFill>
+          <a:ln>
+            <a:noFill/>
           </a:ln>
         </p:spPr>
         <p:txBody>
@@ -5322,23 +5526,23 @@
       </p:sp>
       <p:sp>
         <p:nvSpPr>
-          <p:cNvPr id="14" name="번호 3"/>
+          <p:cNvPr id="15" name="번호 3"/>
           <p:cNvSpPr/>
           <p:nvPr/>
         </p:nvSpPr>
         <p:spPr>
           <a:xfrm>
-            <a:off x="8249716" y="1783080"/>
+            <a:off x="8249716" y="1965960"/>
             <a:ext cx="457200" cy="457200"/>
           </a:xfrm>
           <a:prstGeom prst="ellipse">
             <a:avLst/>
           </a:prstGeom>
-          <a:solidFill>
-            <a:srgbClr val="855A47"/>
-          </a:solidFill>
-          <a:ln>
-            <a:noFill/>
+          <a:noFill/>
+          <a:ln w="19050">
+            <a:solidFill>
+              <a:srgbClr val="D89579"/>
+            </a:solidFill>
           </a:ln>
         </p:spPr>
         <p:txBody>
@@ -5355,7 +5559,7 @@
             <a:r>
               <a:rPr sz="1600" b="1" i="0">
                 <a:solidFill>
-                  <a:srgbClr val="FFFFFF"/>
+                  <a:srgbClr val="493127"/>
                 </a:solidFill>
               </a:rPr>
               <a:t>3</a:t>
@@ -5365,13 +5569,13 @@
       </p:sp>
       <p:sp>
         <p:nvSpPr>
-          <p:cNvPr id="15" name="TextBox 14"/>
+          <p:cNvPr id="16" name="TextBox 15"/>
           <p:cNvSpPr txBox="1"/>
           <p:nvPr/>
         </p:nvSpPr>
         <p:spPr>
           <a:xfrm>
-            <a:off x="8203996" y="2377440"/>
+            <a:off x="8203996" y="2560320"/>
             <a:ext cx="3210458" cy="640080"/>
           </a:xfrm>
           <a:prstGeom prst="rect">
@@ -5393,7 +5597,7 @@
             <a:r>
               <a:rPr sz="1800" b="1" i="0">
                 <a:solidFill>
-                  <a:srgbClr val="422D24"/>
+                  <a:srgbClr val="493127"/>
                 </a:solidFill>
               </a:rPr>
               <a:t>기념 촬영</a:t>
@@ -5403,14 +5607,14 @@
       </p:sp>
       <p:sp>
         <p:nvSpPr>
-          <p:cNvPr id="16" name="TextBox 15"/>
+          <p:cNvPr id="17" name="TextBox 16"/>
           <p:cNvSpPr txBox="1"/>
           <p:nvPr/>
         </p:nvSpPr>
         <p:spPr>
           <a:xfrm>
-            <a:off x="8203996" y="3063240"/>
-            <a:ext cx="3210458" cy="3200400"/>
+            <a:off x="8203996" y="3246120"/>
+            <a:ext cx="3210458" cy="2971800"/>
           </a:xfrm>
           <a:prstGeom prst="rect">
             <a:avLst/>
@@ -5431,7 +5635,7 @@
             <a:r>
               <a:rPr sz="1500" b="0" i="0">
                 <a:solidFill>
-                  <a:srgbClr val="2B2B2B"/>
+                  <a:srgbClr val="26231F"/>
                 </a:solidFill>
               </a:rPr>
               <a:t>입력하세요</a:t>
@@ -5453,7 +5657,7 @@
     <p:bg>
       <p:bgPr>
         <a:solidFill>
-          <a:srgbClr val="FFFFFF"/>
+          <a:srgbClr val="F6DFD5"/>
         </a:solidFill>
         <a:effectLst/>
       </p:bgPr>
@@ -5473,14 +5677,16 @@
         </p:nvSpPr>
         <p:spPr>
           <a:xfrm>
-            <a:off x="9905695" y="-1463040"/>
-            <a:ext cx="3840480" cy="3840480"/>
-          </a:xfrm>
-          <a:prstGeom prst="ellipse">
-            <a:avLst/>
+            <a:off x="640080" y="566928"/>
+            <a:ext cx="64008" cy="868680"/>
+          </a:xfrm>
+          <a:prstGeom prst="roundRect">
+            <a:avLst>
+              <a:gd name="adj" fmla="val 50000"/>
+            </a:avLst>
           </a:prstGeom>
           <a:solidFill>
-            <a:srgbClr val="EBDCD6"/>
+            <a:srgbClr val="D89579"/>
           </a:solidFill>
           <a:ln>
             <a:noFill/>
@@ -5496,20 +5702,58 @@
       </p:sp>
       <p:sp>
         <p:nvSpPr>
-          <p:cNvPr id="4" name="장식"/>
+          <p:cNvPr id="4" name="상단 라벨"/>
+          <p:cNvSpPr txBox="1"/>
+          <p:nvPr/>
+        </p:nvSpPr>
+        <p:spPr>
+          <a:xfrm>
+            <a:off x="868680" y="274320"/>
+            <a:ext cx="5486400" cy="274320"/>
+          </a:xfrm>
+          <a:prstGeom prst="rect">
+            <a:avLst/>
+          </a:prstGeom>
+          <a:noFill/>
+        </p:spPr>
+        <p:txBody>
+          <a:bodyPr wrap="square" lIns="54864" rIns="54864" tIns="27432" bIns="27432" anchor="ctr">
+            <a:noAutofit/>
+          </a:bodyPr>
+          <a:lstStyle/>
+          <a:p>
+            <a:pPr algn="l">
+              <a:lnSpc>
+                <a:spcPct val="115000"/>
+              </a:lnSpc>
+            </a:pPr>
+            <a:r>
+              <a:rPr sz="900" b="1" i="0" spc="250">
+                <a:solidFill>
+                  <a:srgbClr val="8E8780"/>
+                </a:solidFill>
+              </a:rPr>
+              <a:t>WEDDING</a:t>
+            </a:r>
+          </a:p>
+        </p:txBody>
+      </p:sp>
+      <p:sp>
+        <p:nvSpPr>
+          <p:cNvPr id="5" name="포인트"/>
           <p:cNvSpPr/>
           <p:nvPr/>
         </p:nvSpPr>
         <p:spPr>
           <a:xfrm>
-            <a:off x="11094415" y="274320"/>
-            <a:ext cx="411480" cy="411480"/>
-          </a:xfrm>
-          <a:prstGeom prst="ellipse">
+            <a:off x="11167567" y="667512"/>
+            <a:ext cx="310896" cy="310896"/>
+          </a:xfrm>
+          <a:prstGeom prst="donut">
             <a:avLst/>
           </a:prstGeom>
           <a:solidFill>
-            <a:srgbClr val="855A47"/>
+            <a:srgbClr val="EBC0AD"/>
           </a:solidFill>
           <a:ln>
             <a:noFill/>
@@ -5535,8 +5779,8 @@
         </p:nvSpPr>
         <p:spPr>
           <a:xfrm>
-            <a:off x="640080" y="457200"/>
-            <a:ext cx="9722815" cy="868680"/>
+            <a:off x="868680" y="566928"/>
+            <a:ext cx="9448495" cy="868680"/>
           </a:xfrm>
         </p:spPr>
         <p:txBody>
@@ -5553,7 +5797,7 @@
             <a:r>
               <a:rPr sz="3000" b="1" i="0">
                 <a:solidFill>
-                  <a:srgbClr val="422D24"/>
+                  <a:srgbClr val="26231F"/>
                 </a:solidFill>
               </a:rPr>
               <a:t>웨딩 사진</a:t>
@@ -5563,14 +5807,14 @@
       </p:sp>
       <p:sp>
         <p:nvSpPr>
-          <p:cNvPr id="5" name="사진 자리"/>
+          <p:cNvPr id="6" name="사진 자리"/>
           <p:cNvSpPr/>
           <p:nvPr/>
         </p:nvSpPr>
         <p:spPr>
           <a:xfrm>
-            <a:off x="640080" y="1600200"/>
-            <a:ext cx="3515258" cy="2308860"/>
+            <a:off x="640080" y="1783080"/>
+            <a:ext cx="3515258" cy="2194560"/>
           </a:xfrm>
           <a:prstGeom prst="roundRect">
             <a:avLst>
@@ -5578,12 +5822,10 @@
             </a:avLst>
           </a:prstGeom>
           <a:solidFill>
-            <a:srgbClr val="EBDCD6"/>
+            <a:srgbClr val="F6DFD5"/>
           </a:solidFill>
           <a:ln w="19050">
-            <a:solidFill>
-              <a:srgbClr val="855A47"/>
-            </a:solidFill>
+            <a:noFill/>
             <a:prstDash val="dash"/>
           </a:ln>
         </p:spPr>
@@ -5601,7 +5843,7 @@
             <a:r>
               <a:rPr sz="1200" b="0" i="0">
                 <a:solidFill>
-                  <a:srgbClr val="422D24"/>
+                  <a:srgbClr val="8E8780"/>
                 </a:solidFill>
               </a:rPr>
               <a:t>사진 1</a:t>
@@ -5611,14 +5853,14 @@
       </p:sp>
       <p:sp>
         <p:nvSpPr>
-          <p:cNvPr id="6" name="사진 자리"/>
+          <p:cNvPr id="7" name="사진 자리"/>
           <p:cNvSpPr/>
           <p:nvPr/>
         </p:nvSpPr>
         <p:spPr>
           <a:xfrm>
-            <a:off x="4338218" y="1600200"/>
-            <a:ext cx="3515258" cy="2308860"/>
+            <a:off x="4338218" y="1783080"/>
+            <a:ext cx="3515258" cy="2194560"/>
           </a:xfrm>
           <a:prstGeom prst="roundRect">
             <a:avLst>
@@ -5626,12 +5868,10 @@
             </a:avLst>
           </a:prstGeom>
           <a:solidFill>
-            <a:srgbClr val="EBDCD6"/>
+            <a:srgbClr val="F6DFD5"/>
           </a:solidFill>
           <a:ln w="19050">
-            <a:solidFill>
-              <a:srgbClr val="855A47"/>
-            </a:solidFill>
+            <a:noFill/>
             <a:prstDash val="dash"/>
           </a:ln>
         </p:spPr>
@@ -5649,7 +5889,7 @@
             <a:r>
               <a:rPr sz="1200" b="0" i="0">
                 <a:solidFill>
-                  <a:srgbClr val="422D24"/>
+                  <a:srgbClr val="8E8780"/>
                 </a:solidFill>
               </a:rPr>
               <a:t>사진 2</a:t>
@@ -5659,14 +5899,14 @@
       </p:sp>
       <p:sp>
         <p:nvSpPr>
-          <p:cNvPr id="7" name="사진 자리"/>
+          <p:cNvPr id="8" name="사진 자리"/>
           <p:cNvSpPr/>
           <p:nvPr/>
         </p:nvSpPr>
         <p:spPr>
           <a:xfrm>
-            <a:off x="8036356" y="1600200"/>
-            <a:ext cx="3515258" cy="2308860"/>
+            <a:off x="8036356" y="1783080"/>
+            <a:ext cx="3515258" cy="2194560"/>
           </a:xfrm>
           <a:prstGeom prst="roundRect">
             <a:avLst>
@@ -5674,12 +5914,10 @@
             </a:avLst>
           </a:prstGeom>
           <a:solidFill>
-            <a:srgbClr val="EBDCD6"/>
+            <a:srgbClr val="F6DFD5"/>
           </a:solidFill>
           <a:ln w="19050">
-            <a:solidFill>
-              <a:srgbClr val="855A47"/>
-            </a:solidFill>
+            <a:noFill/>
             <a:prstDash val="dash"/>
           </a:ln>
         </p:spPr>
@@ -5697,7 +5935,7 @@
             <a:r>
               <a:rPr sz="1200" b="0" i="0">
                 <a:solidFill>
-                  <a:srgbClr val="422D24"/>
+                  <a:srgbClr val="8E8780"/>
                 </a:solidFill>
               </a:rPr>
               <a:t>사진 3</a:t>
@@ -5707,14 +5945,14 @@
       </p:sp>
       <p:sp>
         <p:nvSpPr>
-          <p:cNvPr id="8" name="사진 자리"/>
+          <p:cNvPr id="9" name="사진 자리"/>
           <p:cNvSpPr/>
           <p:nvPr/>
         </p:nvSpPr>
         <p:spPr>
           <a:xfrm>
-            <a:off x="640080" y="4091939"/>
-            <a:ext cx="3515258" cy="2308860"/>
+            <a:off x="640080" y="4160520"/>
+            <a:ext cx="3515258" cy="2194560"/>
           </a:xfrm>
           <a:prstGeom prst="roundRect">
             <a:avLst>
@@ -5722,12 +5960,10 @@
             </a:avLst>
           </a:prstGeom>
           <a:solidFill>
-            <a:srgbClr val="EBDCD6"/>
+            <a:srgbClr val="F6DFD5"/>
           </a:solidFill>
           <a:ln w="19050">
-            <a:solidFill>
-              <a:srgbClr val="855A47"/>
-            </a:solidFill>
+            <a:noFill/>
             <a:prstDash val="dash"/>
           </a:ln>
         </p:spPr>
@@ -5745,7 +5981,7 @@
             <a:r>
               <a:rPr sz="1200" b="0" i="0">
                 <a:solidFill>
-                  <a:srgbClr val="422D24"/>
+                  <a:srgbClr val="8E8780"/>
                 </a:solidFill>
               </a:rPr>
               <a:t>사진 4</a:t>
@@ -5755,14 +5991,14 @@
       </p:sp>
       <p:sp>
         <p:nvSpPr>
-          <p:cNvPr id="9" name="사진 자리"/>
+          <p:cNvPr id="10" name="사진 자리"/>
           <p:cNvSpPr/>
           <p:nvPr/>
         </p:nvSpPr>
         <p:spPr>
           <a:xfrm>
-            <a:off x="4338218" y="4091939"/>
-            <a:ext cx="3515258" cy="2308860"/>
+            <a:off x="4338218" y="4160520"/>
+            <a:ext cx="3515258" cy="2194560"/>
           </a:xfrm>
           <a:prstGeom prst="roundRect">
             <a:avLst>
@@ -5770,12 +6006,10 @@
             </a:avLst>
           </a:prstGeom>
           <a:solidFill>
-            <a:srgbClr val="EBDCD6"/>
+            <a:srgbClr val="F6DFD5"/>
           </a:solidFill>
           <a:ln w="19050">
-            <a:solidFill>
-              <a:srgbClr val="855A47"/>
-            </a:solidFill>
+            <a:noFill/>
             <a:prstDash val="dash"/>
           </a:ln>
         </p:spPr>
@@ -5793,7 +6027,7 @@
             <a:r>
               <a:rPr sz="1200" b="0" i="0">
                 <a:solidFill>
-                  <a:srgbClr val="422D24"/>
+                  <a:srgbClr val="8E8780"/>
                 </a:solidFill>
               </a:rPr>
               <a:t>사진 5</a:t>
@@ -5803,14 +6037,14 @@
       </p:sp>
       <p:sp>
         <p:nvSpPr>
-          <p:cNvPr id="10" name="사진 자리"/>
+          <p:cNvPr id="11" name="사진 자리"/>
           <p:cNvSpPr/>
           <p:nvPr/>
         </p:nvSpPr>
         <p:spPr>
           <a:xfrm>
-            <a:off x="8036356" y="4091939"/>
-            <a:ext cx="3515258" cy="2308860"/>
+            <a:off x="8036356" y="4160520"/>
+            <a:ext cx="3515258" cy="2194560"/>
           </a:xfrm>
           <a:prstGeom prst="roundRect">
             <a:avLst>
@@ -5818,12 +6052,10 @@
             </a:avLst>
           </a:prstGeom>
           <a:solidFill>
-            <a:srgbClr val="EBDCD6"/>
+            <a:srgbClr val="F6DFD5"/>
           </a:solidFill>
           <a:ln w="19050">
-            <a:solidFill>
-              <a:srgbClr val="855A47"/>
-            </a:solidFill>
+            <a:noFill/>
             <a:prstDash val="dash"/>
           </a:ln>
         </p:spPr>
@@ -5841,7 +6073,7 @@
             <a:r>
               <a:rPr sz="1200" b="0" i="0">
                 <a:solidFill>
-                  <a:srgbClr val="422D24"/>
+                  <a:srgbClr val="8E8780"/>
                 </a:solidFill>
               </a:rPr>
               <a:t>사진 6</a:t>
@@ -5860,6 +6092,14 @@
 <file path=ppt/slides/slide6.xml><?xml version="1.0" encoding="utf-8"?>
 <p:sld xmlns:a="http://schemas.openxmlformats.org/drawingml/2006/main" xmlns:p="http://schemas.openxmlformats.org/presentationml/2006/main" xmlns:r="http://schemas.openxmlformats.org/officeDocument/2006/relationships">
   <p:cSld>
+    <p:bg>
+      <p:bgPr>
+        <a:solidFill>
+          <a:srgbClr val="FBF1EC"/>
+        </a:solidFill>
+        <a:effectLst/>
+      </p:bgPr>
+    </p:bg>
     <p:spTree>
       <p:nvGrpSpPr>
         <p:cNvPr id="1" name=""/>
@@ -5867,30 +6107,116 @@
         <p:nvPr/>
       </p:nvGrpSpPr>
       <p:grpSpPr/>
-      <p:pic>
-        <p:nvPicPr>
-          <p:cNvPr id="3" name="표지 그림" descr="wedding-33.jpg"/>
-          <p:cNvPicPr>
-            <a:picLocks noChangeAspect="1"/>
-          </p:cNvPicPr>
+      <p:sp>
+        <p:nvSpPr>
+          <p:cNvPr id="3" name="사진 자리"/>
+          <p:cNvSpPr/>
           <p:nvPr/>
-        </p:nvPicPr>
-        <p:blipFill>
-          <a:blip r:embed="rId2"/>
-          <a:stretch>
-            <a:fillRect/>
-          </a:stretch>
-        </p:blipFill>
+        </p:nvSpPr>
         <p:spPr>
           <a:xfrm>
             <a:off x="0" y="0"/>
-            <a:ext cx="12191695" cy="6858000"/>
+            <a:ext cx="4389010" cy="6858000"/>
           </a:xfrm>
           <a:prstGeom prst="rect">
             <a:avLst/>
           </a:prstGeom>
-        </p:spPr>
-      </p:pic>
+          <a:solidFill>
+            <a:srgbClr val="EBC0AD"/>
+          </a:solidFill>
+          <a:ln>
+            <a:noFill/>
+          </a:ln>
+        </p:spPr>
+        <p:txBody>
+          <a:bodyPr rtlCol="0" anchor="ctr" wrap="square" lIns="54864" rIns="54864" tIns="27432" bIns="27432">
+            <a:noAutofit/>
+          </a:bodyPr>
+          <a:lstStyle/>
+          <a:p>
+            <a:pPr algn="ctr">
+              <a:lnSpc>
+                <a:spcPct val="100000"/>
+              </a:lnSpc>
+            </a:pPr>
+            <a:r>
+              <a:rPr sz="1400" b="0" i="0">
+                <a:solidFill>
+                  <a:srgbClr val="493127"/>
+                </a:solidFill>
+              </a:rPr>
+              <a:t>사진을 넣어 주세요</a:t>
+            </a:r>
+          </a:p>
+        </p:txBody>
+      </p:sp>
+      <p:sp>
+        <p:nvSpPr>
+          <p:cNvPr id="4" name="장식"/>
+          <p:cNvSpPr/>
+          <p:nvPr/>
+        </p:nvSpPr>
+        <p:spPr>
+          <a:xfrm>
+            <a:off x="365750" y="365760"/>
+            <a:ext cx="3657508" cy="6126480"/>
+          </a:xfrm>
+          <a:prstGeom prst="rect">
+            <a:avLst/>
+          </a:prstGeom>
+          <a:noFill/>
+          <a:ln w="9525">
+            <a:solidFill>
+              <a:srgbClr val="26231F"/>
+            </a:solidFill>
+          </a:ln>
+        </p:spPr>
+        <p:txBody>
+          <a:bodyPr rtlCol="0" anchor="ctr"/>
+          <a:lstStyle/>
+          <a:p>
+            <a:pPr algn="ctr"/>
+          </a:p>
+        </p:txBody>
+      </p:sp>
+      <p:sp>
+        <p:nvSpPr>
+          <p:cNvPr id="5" name="라벨"/>
+          <p:cNvSpPr txBox="1"/>
+          <p:nvPr/>
+        </p:nvSpPr>
+        <p:spPr>
+          <a:xfrm>
+            <a:off x="6827349" y="2148840"/>
+            <a:ext cx="4632844" cy="274320"/>
+          </a:xfrm>
+          <a:prstGeom prst="rect">
+            <a:avLst/>
+          </a:prstGeom>
+          <a:noFill/>
+        </p:spPr>
+        <p:txBody>
+          <a:bodyPr wrap="square" lIns="54864" rIns="54864" tIns="27432" bIns="27432" anchor="t">
+            <a:noAutofit/>
+          </a:bodyPr>
+          <a:lstStyle/>
+          <a:p>
+            <a:pPr algn="l">
+              <a:lnSpc>
+                <a:spcPct val="115000"/>
+              </a:lnSpc>
+            </a:pPr>
+            <a:r>
+              <a:rPr sz="1000" b="1" i="0" spc="250">
+                <a:solidFill>
+                  <a:srgbClr val="26231F"/>
+                </a:solidFill>
+              </a:rPr>
+              <a:t>WEDDING</a:t>
+            </a:r>
+          </a:p>
+        </p:txBody>
+      </p:sp>
       <p:sp>
         <p:nvSpPr>
           <p:cNvPr id="2" name="Title 1"/>
@@ -5903,8 +6229,8 @@
         </p:nvSpPr>
         <p:spPr>
           <a:xfrm>
-            <a:off x="853418" y="2057400"/>
-            <a:ext cx="6095847" cy="1554480"/>
+            <a:off x="6827349" y="2606040"/>
+            <a:ext cx="4632844" cy="1188720"/>
           </a:xfrm>
         </p:spPr>
         <p:txBody>
@@ -5921,7 +6247,7 @@
             <a:r>
               <a:rPr sz="3400" b="1" i="0">
                 <a:solidFill>
-                  <a:srgbClr val="422D24"/>
+                  <a:srgbClr val="26231F"/>
                 </a:solidFill>
               </a:rPr>
               <a:t>와 주셔서 고맙습니다</a:t>
@@ -5931,14 +6257,14 @@
       </p:sp>
       <p:sp>
         <p:nvSpPr>
-          <p:cNvPr id="4" name="한 줄 문구"/>
+          <p:cNvPr id="6" name="한 줄 문구"/>
           <p:cNvSpPr txBox="1"/>
           <p:nvPr/>
         </p:nvSpPr>
         <p:spPr>
           <a:xfrm>
-            <a:off x="853418" y="3749039"/>
-            <a:ext cx="6095847" cy="822960"/>
+            <a:off x="6827349" y="3886200"/>
+            <a:ext cx="4632844" cy="822960"/>
           </a:xfrm>
           <a:prstGeom prst="rect">
             <a:avLst/>
@@ -5957,9 +6283,9 @@
               </a:lnSpc>
             </a:pPr>
             <a:r>
-              <a:rPr sz="1700" b="0" i="1">
+              <a:rPr sz="1700" b="0" i="0">
                 <a:solidFill>
-                  <a:srgbClr val="422D24"/>
+                  <a:srgbClr val="26231F"/>
                 </a:solidFill>
               </a:rPr>
               <a:t>잘 살겠습니다</a:t>
@@ -5969,14 +6295,14 @@
       </p:sp>
       <p:sp>
         <p:nvSpPr>
-          <p:cNvPr id="5" name="안내 문구"/>
+          <p:cNvPr id="7" name="안내 문구"/>
           <p:cNvSpPr txBox="1"/>
           <p:nvPr/>
         </p:nvSpPr>
         <p:spPr>
           <a:xfrm>
-            <a:off x="853418" y="4617720"/>
-            <a:ext cx="6095847" cy="914400"/>
+            <a:off x="6827349" y="4754880"/>
+            <a:ext cx="4632844" cy="914400"/>
           </a:xfrm>
           <a:prstGeom prst="rect">
             <a:avLst/>
@@ -5997,7 +6323,7 @@
             <a:r>
               <a:rPr sz="1400" b="0" i="0">
                 <a:solidFill>
-                  <a:srgbClr val="666666"/>
+                  <a:srgbClr val="26231F"/>
                 </a:solidFill>
               </a:rPr>
               <a:t>신랑 이름 ♥ 신부 이름</a:t>
@@ -6024,34 +6350,34 @@
         <a:sysClr val="window" lastClr="FFFFFF"/>
       </a:lt1>
       <a:dk2>
-        <a:srgbClr val="422D24"/>
+        <a:srgbClr val="493127"/>
       </a:dk2>
       <a:lt2>
-        <a:srgbClr val="F8F4F2"/>
+        <a:srgbClr val="FBF1EC"/>
       </a:lt2>
       <a:accent1>
-        <a:srgbClr val="855A47"/>
+        <a:srgbClr val="D89579"/>
       </a:accent1>
       <a:accent2>
-        <a:srgbClr val="478578"/>
+        <a:srgbClr val="E1D098"/>
       </a:accent2>
       <a:accent3>
-        <a:srgbClr val="422D24"/>
+        <a:srgbClr val="493127"/>
       </a:accent3>
       <a:accent4>
-        <a:srgbClr val="EBDCD6"/>
+        <a:srgbClr val="F6DFD5"/>
       </a:accent4>
       <a:accent5>
-        <a:srgbClr val="667060"/>
+        <a:srgbClr val="DCB288"/>
       </a:accent5>
       <a:accent6>
-        <a:srgbClr val="8E817C"/>
+        <a:srgbClr val="92837D"/>
       </a:accent6>
       <a:hlink>
-        <a:srgbClr val="855A47"/>
+        <a:srgbClr val="D89579"/>
       </a:hlink>
       <a:folHlink>
-        <a:srgbClr val="422D24"/>
+        <a:srgbClr val="493127"/>
       </a:folHlink>
     </a:clrScheme>
     <a:fontScheme name="Office">
